--- a/Part7_Phylogenetics/Part7_Phylogenetics.pptx
+++ b/Part7_Phylogenetics/Part7_Phylogenetics.pptx
@@ -206,7 +206,7 @@
           <a:p>
             <a:fld id="{B5EDAD82-4A91-4FCD-8377-229631DED7F6}" type="datetimeFigureOut">
               <a:rPr lang="en-US" smtClean="0"/>
-              <a:t>7/21/2026</a:t>
+              <a:t>7/22/2026</a:t>
             </a:fld>
             <a:endParaRPr lang="en-US"/>
           </a:p>
@@ -1352,7 +1352,7 @@
           <a:p>
             <a:fld id="{5F8D886E-E654-4DF1-A3A6-2277A53517B0}" type="datetimeFigureOut">
               <a:rPr lang="en-US" smtClean="0"/>
-              <a:t>7/21/2026</a:t>
+              <a:t>7/22/2026</a:t>
             </a:fld>
             <a:endParaRPr lang="en-US"/>
           </a:p>
@@ -1550,7 +1550,7 @@
           <a:p>
             <a:fld id="{5F8D886E-E654-4DF1-A3A6-2277A53517B0}" type="datetimeFigureOut">
               <a:rPr lang="en-US" smtClean="0"/>
-              <a:t>7/21/2026</a:t>
+              <a:t>7/22/2026</a:t>
             </a:fld>
             <a:endParaRPr lang="en-US"/>
           </a:p>
@@ -1758,7 +1758,7 @@
           <a:p>
             <a:fld id="{5F8D886E-E654-4DF1-A3A6-2277A53517B0}" type="datetimeFigureOut">
               <a:rPr lang="en-US" smtClean="0"/>
-              <a:t>7/21/2026</a:t>
+              <a:t>7/22/2026</a:t>
             </a:fld>
             <a:endParaRPr lang="en-US"/>
           </a:p>
@@ -1956,7 +1956,7 @@
           <a:p>
             <a:fld id="{5F8D886E-E654-4DF1-A3A6-2277A53517B0}" type="datetimeFigureOut">
               <a:rPr lang="en-US" smtClean="0"/>
-              <a:t>7/21/2026</a:t>
+              <a:t>7/22/2026</a:t>
             </a:fld>
             <a:endParaRPr lang="en-US"/>
           </a:p>
@@ -2231,7 +2231,7 @@
           <a:p>
             <a:fld id="{5F8D886E-E654-4DF1-A3A6-2277A53517B0}" type="datetimeFigureOut">
               <a:rPr lang="en-US" smtClean="0"/>
-              <a:t>7/21/2026</a:t>
+              <a:t>7/22/2026</a:t>
             </a:fld>
             <a:endParaRPr lang="en-US"/>
           </a:p>
@@ -2496,7 +2496,7 @@
           <a:p>
             <a:fld id="{5F8D886E-E654-4DF1-A3A6-2277A53517B0}" type="datetimeFigureOut">
               <a:rPr lang="en-US" smtClean="0"/>
-              <a:t>7/21/2026</a:t>
+              <a:t>7/22/2026</a:t>
             </a:fld>
             <a:endParaRPr lang="en-US"/>
           </a:p>
@@ -2908,7 +2908,7 @@
           <a:p>
             <a:fld id="{5F8D886E-E654-4DF1-A3A6-2277A53517B0}" type="datetimeFigureOut">
               <a:rPr lang="en-US" smtClean="0"/>
-              <a:t>7/21/2026</a:t>
+              <a:t>7/22/2026</a:t>
             </a:fld>
             <a:endParaRPr lang="en-US"/>
           </a:p>
@@ -3049,7 +3049,7 @@
           <a:p>
             <a:fld id="{5F8D886E-E654-4DF1-A3A6-2277A53517B0}" type="datetimeFigureOut">
               <a:rPr lang="en-US" smtClean="0"/>
-              <a:t>7/21/2026</a:t>
+              <a:t>7/22/2026</a:t>
             </a:fld>
             <a:endParaRPr lang="en-US"/>
           </a:p>
@@ -3162,7 +3162,7 @@
           <a:p>
             <a:fld id="{5F8D886E-E654-4DF1-A3A6-2277A53517B0}" type="datetimeFigureOut">
               <a:rPr lang="en-US" smtClean="0"/>
-              <a:t>7/21/2026</a:t>
+              <a:t>7/22/2026</a:t>
             </a:fld>
             <a:endParaRPr lang="en-US"/>
           </a:p>
@@ -3473,7 +3473,7 @@
           <a:p>
             <a:fld id="{5F8D886E-E654-4DF1-A3A6-2277A53517B0}" type="datetimeFigureOut">
               <a:rPr lang="en-US" smtClean="0"/>
-              <a:t>7/21/2026</a:t>
+              <a:t>7/22/2026</a:t>
             </a:fld>
             <a:endParaRPr lang="en-US"/>
           </a:p>
@@ -3761,7 +3761,7 @@
           <a:p>
             <a:fld id="{5F8D886E-E654-4DF1-A3A6-2277A53517B0}" type="datetimeFigureOut">
               <a:rPr lang="en-US" smtClean="0"/>
-              <a:t>7/21/2026</a:t>
+              <a:t>7/22/2026</a:t>
             </a:fld>
             <a:endParaRPr lang="en-US"/>
           </a:p>
@@ -4002,7 +4002,7 @@
           <a:p>
             <a:fld id="{5F8D886E-E654-4DF1-A3A6-2277A53517B0}" type="datetimeFigureOut">
               <a:rPr lang="en-US" smtClean="0"/>
-              <a:t>7/21/2026</a:t>
+              <a:t>7/22/2026</a:t>
             </a:fld>
             <a:endParaRPr lang="en-US"/>
           </a:p>
@@ -4692,7 +4692,7 @@
                 <a:latin typeface="Aharoni" panose="02010803020104030203" pitchFamily="2" charset="-79"/>
                 <a:cs typeface="Aharoni" panose="02010803020104030203" pitchFamily="2" charset="-79"/>
               </a:rPr>
-              <a:t>Phylogenetics</a:t>
+              <a:t>Phylogenies at small scales</a:t>
             </a:r>
           </a:p>
         </p:txBody>
@@ -4935,33 +4935,6 @@
                                   </p:childTnLst>
                                 </p:cTn>
                               </p:par>
-                              <p:par>
-                                <p:cTn id="13" presetID="1" presetClass="entr" presetSubtype="0" fill="hold" nodeType="withEffect">
-                                  <p:stCondLst>
-                                    <p:cond delay="0"/>
-                                  </p:stCondLst>
-                                  <p:childTnLst>
-                                    <p:set>
-                                      <p:cBhvr>
-                                        <p:cTn id="14" dur="1" fill="hold">
-                                          <p:stCondLst>
-                                            <p:cond delay="0"/>
-                                          </p:stCondLst>
-                                        </p:cTn>
-                                        <p:tgtEl>
-                                          <p:spTgt spid="4"/>
-                                        </p:tgtEl>
-                                        <p:attrNameLst>
-                                          <p:attrName>style.visibility</p:attrName>
-                                        </p:attrNameLst>
-                                      </p:cBhvr>
-                                      <p:to>
-                                        <p:strVal val="visible"/>
-                                      </p:to>
-                                    </p:set>
-                                  </p:childTnLst>
-                                </p:cTn>
-                              </p:par>
                             </p:childTnLst>
                           </p:cTn>
                         </p:par>
@@ -5082,7 +5055,7 @@
               <a:rPr lang="en-US" dirty="0">
                 <a:latin typeface="Abadi" panose="020B0604020104020204" pitchFamily="34" charset="0"/>
               </a:rPr>
-              <a:t>One aspect of phylogenetic data is that it favors sequences from individuals, something Stacks is obnoxious about</a:t>
+              <a:t>One aspect of phylogenetics is that it favors sequences from individuals, something Stacks is obnoxious about</a:t>
             </a:r>
           </a:p>
           <a:p>
@@ -5219,6 +5192,241 @@
   <p:clrMapOvr>
     <a:masterClrMapping/>
   </p:clrMapOvr>
+  <p:timing>
+    <p:tnLst>
+      <p:par>
+        <p:cTn id="1" dur="indefinite" restart="never" nodeType="tmRoot">
+          <p:childTnLst>
+            <p:seq concurrent="1" nextAc="seek">
+              <p:cTn id="2" dur="indefinite" nodeType="mainSeq">
+                <p:childTnLst>
+                  <p:par>
+                    <p:cTn id="3" fill="hold">
+                      <p:stCondLst>
+                        <p:cond delay="indefinite"/>
+                      </p:stCondLst>
+                      <p:childTnLst>
+                        <p:par>
+                          <p:cTn id="4" fill="hold">
+                            <p:stCondLst>
+                              <p:cond delay="0"/>
+                            </p:stCondLst>
+                            <p:childTnLst>
+                              <p:par>
+                                <p:cTn id="5" presetID="1" presetClass="entr" presetSubtype="0" fill="hold" grpId="0" nodeType="clickEffect">
+                                  <p:stCondLst>
+                                    <p:cond delay="0"/>
+                                  </p:stCondLst>
+                                  <p:childTnLst>
+                                    <p:set>
+                                      <p:cBhvr>
+                                        <p:cTn id="6" dur="1" fill="hold">
+                                          <p:stCondLst>
+                                            <p:cond delay="0"/>
+                                          </p:stCondLst>
+                                        </p:cTn>
+                                        <p:tgtEl>
+                                          <p:spTgt spid="7">
+                                            <p:txEl>
+                                              <p:pRg st="0" end="0"/>
+                                            </p:txEl>
+                                          </p:spTgt>
+                                        </p:tgtEl>
+                                        <p:attrNameLst>
+                                          <p:attrName>style.visibility</p:attrName>
+                                        </p:attrNameLst>
+                                      </p:cBhvr>
+                                      <p:to>
+                                        <p:strVal val="visible"/>
+                                      </p:to>
+                                    </p:set>
+                                  </p:childTnLst>
+                                </p:cTn>
+                              </p:par>
+                            </p:childTnLst>
+                          </p:cTn>
+                        </p:par>
+                      </p:childTnLst>
+                    </p:cTn>
+                  </p:par>
+                  <p:par>
+                    <p:cTn id="7" fill="hold">
+                      <p:stCondLst>
+                        <p:cond delay="indefinite"/>
+                      </p:stCondLst>
+                      <p:childTnLst>
+                        <p:par>
+                          <p:cTn id="8" fill="hold">
+                            <p:stCondLst>
+                              <p:cond delay="0"/>
+                            </p:stCondLst>
+                            <p:childTnLst>
+                              <p:par>
+                                <p:cTn id="9" presetID="1" presetClass="entr" presetSubtype="0" fill="hold" grpId="0" nodeType="clickEffect">
+                                  <p:stCondLst>
+                                    <p:cond delay="0"/>
+                                  </p:stCondLst>
+                                  <p:childTnLst>
+                                    <p:set>
+                                      <p:cBhvr>
+                                        <p:cTn id="10" dur="1" fill="hold">
+                                          <p:stCondLst>
+                                            <p:cond delay="0"/>
+                                          </p:stCondLst>
+                                        </p:cTn>
+                                        <p:tgtEl>
+                                          <p:spTgt spid="7">
+                                            <p:txEl>
+                                              <p:pRg st="1" end="1"/>
+                                            </p:txEl>
+                                          </p:spTgt>
+                                        </p:tgtEl>
+                                        <p:attrNameLst>
+                                          <p:attrName>style.visibility</p:attrName>
+                                        </p:attrNameLst>
+                                      </p:cBhvr>
+                                      <p:to>
+                                        <p:strVal val="visible"/>
+                                      </p:to>
+                                    </p:set>
+                                  </p:childTnLst>
+                                </p:cTn>
+                              </p:par>
+                              <p:par>
+                                <p:cTn id="11" presetID="1" presetClass="entr" presetSubtype="0" fill="hold" nodeType="withEffect">
+                                  <p:stCondLst>
+                                    <p:cond delay="0"/>
+                                  </p:stCondLst>
+                                  <p:childTnLst>
+                                    <p:set>
+                                      <p:cBhvr>
+                                        <p:cTn id="12" dur="1" fill="hold">
+                                          <p:stCondLst>
+                                            <p:cond delay="0"/>
+                                          </p:stCondLst>
+                                        </p:cTn>
+                                        <p:tgtEl>
+                                          <p:spTgt spid="10"/>
+                                        </p:tgtEl>
+                                        <p:attrNameLst>
+                                          <p:attrName>style.visibility</p:attrName>
+                                        </p:attrNameLst>
+                                      </p:cBhvr>
+                                      <p:to>
+                                        <p:strVal val="visible"/>
+                                      </p:to>
+                                    </p:set>
+                                  </p:childTnLst>
+                                </p:cTn>
+                              </p:par>
+                            </p:childTnLst>
+                          </p:cTn>
+                        </p:par>
+                      </p:childTnLst>
+                    </p:cTn>
+                  </p:par>
+                  <p:par>
+                    <p:cTn id="13" fill="hold">
+                      <p:stCondLst>
+                        <p:cond delay="indefinite"/>
+                      </p:stCondLst>
+                      <p:childTnLst>
+                        <p:par>
+                          <p:cTn id="14" fill="hold">
+                            <p:stCondLst>
+                              <p:cond delay="0"/>
+                            </p:stCondLst>
+                            <p:childTnLst>
+                              <p:par>
+                                <p:cTn id="15" presetID="1" presetClass="entr" presetSubtype="0" fill="hold" grpId="0" nodeType="clickEffect">
+                                  <p:stCondLst>
+                                    <p:cond delay="0"/>
+                                  </p:stCondLst>
+                                  <p:childTnLst>
+                                    <p:set>
+                                      <p:cBhvr>
+                                        <p:cTn id="16" dur="1" fill="hold">
+                                          <p:stCondLst>
+                                            <p:cond delay="0"/>
+                                          </p:stCondLst>
+                                        </p:cTn>
+                                        <p:tgtEl>
+                                          <p:spTgt spid="7">
+                                            <p:txEl>
+                                              <p:pRg st="2" end="2"/>
+                                            </p:txEl>
+                                          </p:spTgt>
+                                        </p:tgtEl>
+                                        <p:attrNameLst>
+                                          <p:attrName>style.visibility</p:attrName>
+                                        </p:attrNameLst>
+                                      </p:cBhvr>
+                                      <p:to>
+                                        <p:strVal val="visible"/>
+                                      </p:to>
+                                    </p:set>
+                                  </p:childTnLst>
+                                </p:cTn>
+                              </p:par>
+                              <p:par>
+                                <p:cTn id="17" presetID="1" presetClass="entr" presetSubtype="0" fill="hold" grpId="0" nodeType="withEffect">
+                                  <p:stCondLst>
+                                    <p:cond delay="0"/>
+                                  </p:stCondLst>
+                                  <p:childTnLst>
+                                    <p:set>
+                                      <p:cBhvr>
+                                        <p:cTn id="18" dur="1" fill="hold">
+                                          <p:stCondLst>
+                                            <p:cond delay="0"/>
+                                          </p:stCondLst>
+                                        </p:cTn>
+                                        <p:tgtEl>
+                                          <p:spTgt spid="8"/>
+                                        </p:tgtEl>
+                                        <p:attrNameLst>
+                                          <p:attrName>style.visibility</p:attrName>
+                                        </p:attrNameLst>
+                                      </p:cBhvr>
+                                      <p:to>
+                                        <p:strVal val="visible"/>
+                                      </p:to>
+                                    </p:set>
+                                  </p:childTnLst>
+                                </p:cTn>
+                              </p:par>
+                            </p:childTnLst>
+                          </p:cTn>
+                        </p:par>
+                      </p:childTnLst>
+                    </p:cTn>
+                  </p:par>
+                </p:childTnLst>
+              </p:cTn>
+              <p:prevCondLst>
+                <p:cond evt="onPrev" delay="0">
+                  <p:tgtEl>
+                    <p:sldTgt/>
+                  </p:tgtEl>
+                </p:cond>
+              </p:prevCondLst>
+              <p:nextCondLst>
+                <p:cond evt="onNext" delay="0">
+                  <p:tgtEl>
+                    <p:sldTgt/>
+                  </p:tgtEl>
+                </p:cond>
+              </p:nextCondLst>
+            </p:seq>
+          </p:childTnLst>
+        </p:cTn>
+      </p:par>
+    </p:tnLst>
+    <p:bldLst>
+      <p:bldP spid="7" grpId="0" uiExpand="1" build="p"/>
+      <p:bldP spid="8" grpId="0"/>
+    </p:bldLst>
+  </p:timing>
 </p:sld>
 </file>
 
@@ -5387,7 +5595,7 @@
         <p:spPr>
           <a:xfrm>
             <a:off x="2144486" y="3995678"/>
-            <a:ext cx="8293719" cy="2862322"/>
+            <a:ext cx="9408177" cy="2862322"/>
           </a:xfrm>
           <a:prstGeom prst="rect">
             <a:avLst/>
@@ -5527,7 +5735,7 @@
           <a:p>
             <a:r>
               <a:rPr lang="en-US" dirty="0"/>
-              <a:t>mv </a:t>
+              <a:t>grep -v "#" </a:t>
             </a:r>
             <a:r>
               <a:rPr lang="en-US" dirty="0" err="1"/>
@@ -5543,7 +5751,7 @@
             </a:r>
             <a:r>
               <a:rPr lang="en-US" dirty="0"/>
-              <a:t> output/NAME_75.phylip</a:t>
+              <a:t> &gt; output/NAME_75.phylip</a:t>
             </a:r>
           </a:p>
         </p:txBody>
@@ -5558,6 +5766,263 @@
   <p:clrMapOvr>
     <a:masterClrMapping/>
   </p:clrMapOvr>
+  <p:timing>
+    <p:tnLst>
+      <p:par>
+        <p:cTn id="1" dur="indefinite" restart="never" nodeType="tmRoot">
+          <p:childTnLst>
+            <p:seq concurrent="1" nextAc="seek">
+              <p:cTn id="2" dur="indefinite" nodeType="mainSeq">
+                <p:childTnLst>
+                  <p:par>
+                    <p:cTn id="3" fill="hold">
+                      <p:stCondLst>
+                        <p:cond delay="indefinite"/>
+                      </p:stCondLst>
+                      <p:childTnLst>
+                        <p:par>
+                          <p:cTn id="4" fill="hold">
+                            <p:stCondLst>
+                              <p:cond delay="0"/>
+                            </p:stCondLst>
+                            <p:childTnLst>
+                              <p:par>
+                                <p:cTn id="5" presetID="1" presetClass="entr" presetSubtype="0" fill="hold" grpId="0" nodeType="clickEffect">
+                                  <p:stCondLst>
+                                    <p:cond delay="0"/>
+                                  </p:stCondLst>
+                                  <p:childTnLst>
+                                    <p:set>
+                                      <p:cBhvr>
+                                        <p:cTn id="6" dur="1" fill="hold">
+                                          <p:stCondLst>
+                                            <p:cond delay="0"/>
+                                          </p:stCondLst>
+                                        </p:cTn>
+                                        <p:tgtEl>
+                                          <p:spTgt spid="7">
+                                            <p:txEl>
+                                              <p:pRg st="0" end="0"/>
+                                            </p:txEl>
+                                          </p:spTgt>
+                                        </p:tgtEl>
+                                        <p:attrNameLst>
+                                          <p:attrName>style.visibility</p:attrName>
+                                        </p:attrNameLst>
+                                      </p:cBhvr>
+                                      <p:to>
+                                        <p:strVal val="visible"/>
+                                      </p:to>
+                                    </p:set>
+                                  </p:childTnLst>
+                                </p:cTn>
+                              </p:par>
+                            </p:childTnLst>
+                          </p:cTn>
+                        </p:par>
+                      </p:childTnLst>
+                    </p:cTn>
+                  </p:par>
+                  <p:par>
+                    <p:cTn id="7" fill="hold">
+                      <p:stCondLst>
+                        <p:cond delay="indefinite"/>
+                      </p:stCondLst>
+                      <p:childTnLst>
+                        <p:par>
+                          <p:cTn id="8" fill="hold">
+                            <p:stCondLst>
+                              <p:cond delay="0"/>
+                            </p:stCondLst>
+                            <p:childTnLst>
+                              <p:par>
+                                <p:cTn id="9" presetID="1" presetClass="entr" presetSubtype="0" fill="hold" grpId="0" nodeType="clickEffect">
+                                  <p:stCondLst>
+                                    <p:cond delay="0"/>
+                                  </p:stCondLst>
+                                  <p:childTnLst>
+                                    <p:set>
+                                      <p:cBhvr>
+                                        <p:cTn id="10" dur="1" fill="hold">
+                                          <p:stCondLst>
+                                            <p:cond delay="0"/>
+                                          </p:stCondLst>
+                                        </p:cTn>
+                                        <p:tgtEl>
+                                          <p:spTgt spid="7">
+                                            <p:txEl>
+                                              <p:pRg st="1" end="1"/>
+                                            </p:txEl>
+                                          </p:spTgt>
+                                        </p:tgtEl>
+                                        <p:attrNameLst>
+                                          <p:attrName>style.visibility</p:attrName>
+                                        </p:attrNameLst>
+                                      </p:cBhvr>
+                                      <p:to>
+                                        <p:strVal val="visible"/>
+                                      </p:to>
+                                    </p:set>
+                                  </p:childTnLst>
+                                </p:cTn>
+                              </p:par>
+                              <p:par>
+                                <p:cTn id="11" presetID="1" presetClass="entr" presetSubtype="0" fill="hold" grpId="0" nodeType="withEffect">
+                                  <p:stCondLst>
+                                    <p:cond delay="0"/>
+                                  </p:stCondLst>
+                                  <p:childTnLst>
+                                    <p:set>
+                                      <p:cBhvr>
+                                        <p:cTn id="12" dur="1" fill="hold">
+                                          <p:stCondLst>
+                                            <p:cond delay="0"/>
+                                          </p:stCondLst>
+                                        </p:cTn>
+                                        <p:tgtEl>
+                                          <p:spTgt spid="7">
+                                            <p:txEl>
+                                              <p:pRg st="2" end="2"/>
+                                            </p:txEl>
+                                          </p:spTgt>
+                                        </p:tgtEl>
+                                        <p:attrNameLst>
+                                          <p:attrName>style.visibility</p:attrName>
+                                        </p:attrNameLst>
+                                      </p:cBhvr>
+                                      <p:to>
+                                        <p:strVal val="visible"/>
+                                      </p:to>
+                                    </p:set>
+                                  </p:childTnLst>
+                                </p:cTn>
+                              </p:par>
+                            </p:childTnLst>
+                          </p:cTn>
+                        </p:par>
+                      </p:childTnLst>
+                    </p:cTn>
+                  </p:par>
+                  <p:par>
+                    <p:cTn id="13" fill="hold">
+                      <p:stCondLst>
+                        <p:cond delay="indefinite"/>
+                      </p:stCondLst>
+                      <p:childTnLst>
+                        <p:par>
+                          <p:cTn id="14" fill="hold">
+                            <p:stCondLst>
+                              <p:cond delay="0"/>
+                            </p:stCondLst>
+                            <p:childTnLst>
+                              <p:par>
+                                <p:cTn id="15" presetID="1" presetClass="entr" presetSubtype="0" fill="hold" grpId="0" nodeType="clickEffect">
+                                  <p:stCondLst>
+                                    <p:cond delay="0"/>
+                                  </p:stCondLst>
+                                  <p:childTnLst>
+                                    <p:set>
+                                      <p:cBhvr>
+                                        <p:cTn id="16" dur="1" fill="hold">
+                                          <p:stCondLst>
+                                            <p:cond delay="0"/>
+                                          </p:stCondLst>
+                                        </p:cTn>
+                                        <p:tgtEl>
+                                          <p:spTgt spid="7">
+                                            <p:txEl>
+                                              <p:pRg st="3" end="3"/>
+                                            </p:txEl>
+                                          </p:spTgt>
+                                        </p:tgtEl>
+                                        <p:attrNameLst>
+                                          <p:attrName>style.visibility</p:attrName>
+                                        </p:attrNameLst>
+                                      </p:cBhvr>
+                                      <p:to>
+                                        <p:strVal val="visible"/>
+                                      </p:to>
+                                    </p:set>
+                                  </p:childTnLst>
+                                </p:cTn>
+                              </p:par>
+                            </p:childTnLst>
+                          </p:cTn>
+                        </p:par>
+                      </p:childTnLst>
+                    </p:cTn>
+                  </p:par>
+                  <p:par>
+                    <p:cTn id="17" fill="hold">
+                      <p:stCondLst>
+                        <p:cond delay="indefinite"/>
+                      </p:stCondLst>
+                      <p:childTnLst>
+                        <p:par>
+                          <p:cTn id="18" fill="hold">
+                            <p:stCondLst>
+                              <p:cond delay="0"/>
+                            </p:stCondLst>
+                            <p:childTnLst>
+                              <p:par>
+                                <p:cTn id="19" presetID="1" presetClass="entr" presetSubtype="0" fill="hold" grpId="0" nodeType="clickEffect">
+                                  <p:stCondLst>
+                                    <p:cond delay="0"/>
+                                  </p:stCondLst>
+                                  <p:childTnLst>
+                                    <p:set>
+                                      <p:cBhvr>
+                                        <p:cTn id="20" dur="1" fill="hold">
+                                          <p:stCondLst>
+                                            <p:cond delay="0"/>
+                                          </p:stCondLst>
+                                        </p:cTn>
+                                        <p:tgtEl>
+                                          <p:spTgt spid="5"/>
+                                        </p:tgtEl>
+                                        <p:attrNameLst>
+                                          <p:attrName>style.visibility</p:attrName>
+                                        </p:attrNameLst>
+                                      </p:cBhvr>
+                                      <p:to>
+                                        <p:strVal val="visible"/>
+                                      </p:to>
+                                    </p:set>
+                                  </p:childTnLst>
+                                </p:cTn>
+                              </p:par>
+                            </p:childTnLst>
+                          </p:cTn>
+                        </p:par>
+                      </p:childTnLst>
+                    </p:cTn>
+                  </p:par>
+                </p:childTnLst>
+              </p:cTn>
+              <p:prevCondLst>
+                <p:cond evt="onPrev" delay="0">
+                  <p:tgtEl>
+                    <p:sldTgt/>
+                  </p:tgtEl>
+                </p:cond>
+              </p:prevCondLst>
+              <p:nextCondLst>
+                <p:cond evt="onNext" delay="0">
+                  <p:tgtEl>
+                    <p:sldTgt/>
+                  </p:tgtEl>
+                </p:cond>
+              </p:nextCondLst>
+            </p:seq>
+          </p:childTnLst>
+        </p:cTn>
+      </p:par>
+    </p:tnLst>
+    <p:bldLst>
+      <p:bldP spid="7" grpId="0" uiExpand="1" build="p"/>
+      <p:bldP spid="5" grpId="0"/>
+    </p:bldLst>
+  </p:timing>
 </p:sld>
 </file>
 
@@ -5884,6 +6349,390 @@
   <p:clrMapOvr>
     <a:masterClrMapping/>
   </p:clrMapOvr>
+  <p:timing>
+    <p:tnLst>
+      <p:par>
+        <p:cTn id="1" dur="indefinite" restart="never" nodeType="tmRoot">
+          <p:childTnLst>
+            <p:seq concurrent="1" nextAc="seek">
+              <p:cTn id="2" dur="indefinite" nodeType="mainSeq">
+                <p:childTnLst>
+                  <p:par>
+                    <p:cTn id="3" fill="hold">
+                      <p:stCondLst>
+                        <p:cond delay="indefinite"/>
+                      </p:stCondLst>
+                      <p:childTnLst>
+                        <p:par>
+                          <p:cTn id="4" fill="hold">
+                            <p:stCondLst>
+                              <p:cond delay="0"/>
+                            </p:stCondLst>
+                            <p:childTnLst>
+                              <p:par>
+                                <p:cTn id="5" presetID="1" presetClass="entr" presetSubtype="0" fill="hold" grpId="0" nodeType="clickEffect">
+                                  <p:stCondLst>
+                                    <p:cond delay="0"/>
+                                  </p:stCondLst>
+                                  <p:childTnLst>
+                                    <p:set>
+                                      <p:cBhvr>
+                                        <p:cTn id="6" dur="1" fill="hold">
+                                          <p:stCondLst>
+                                            <p:cond delay="0"/>
+                                          </p:stCondLst>
+                                        </p:cTn>
+                                        <p:tgtEl>
+                                          <p:spTgt spid="7">
+                                            <p:txEl>
+                                              <p:pRg st="0" end="0"/>
+                                            </p:txEl>
+                                          </p:spTgt>
+                                        </p:tgtEl>
+                                        <p:attrNameLst>
+                                          <p:attrName>style.visibility</p:attrName>
+                                        </p:attrNameLst>
+                                      </p:cBhvr>
+                                      <p:to>
+                                        <p:strVal val="visible"/>
+                                      </p:to>
+                                    </p:set>
+                                  </p:childTnLst>
+                                </p:cTn>
+                              </p:par>
+                              <p:par>
+                                <p:cTn id="7" presetID="1" presetClass="entr" presetSubtype="0" fill="hold" grpId="0" nodeType="withEffect">
+                                  <p:stCondLst>
+                                    <p:cond delay="0"/>
+                                  </p:stCondLst>
+                                  <p:childTnLst>
+                                    <p:set>
+                                      <p:cBhvr>
+                                        <p:cTn id="8" dur="1" fill="hold">
+                                          <p:stCondLst>
+                                            <p:cond delay="0"/>
+                                          </p:stCondLst>
+                                        </p:cTn>
+                                        <p:tgtEl>
+                                          <p:spTgt spid="7">
+                                            <p:txEl>
+                                              <p:pRg st="1" end="1"/>
+                                            </p:txEl>
+                                          </p:spTgt>
+                                        </p:tgtEl>
+                                        <p:attrNameLst>
+                                          <p:attrName>style.visibility</p:attrName>
+                                        </p:attrNameLst>
+                                      </p:cBhvr>
+                                      <p:to>
+                                        <p:strVal val="visible"/>
+                                      </p:to>
+                                    </p:set>
+                                  </p:childTnLst>
+                                </p:cTn>
+                              </p:par>
+                            </p:childTnLst>
+                          </p:cTn>
+                        </p:par>
+                      </p:childTnLst>
+                    </p:cTn>
+                  </p:par>
+                  <p:par>
+                    <p:cTn id="9" fill="hold">
+                      <p:stCondLst>
+                        <p:cond delay="indefinite"/>
+                      </p:stCondLst>
+                      <p:childTnLst>
+                        <p:par>
+                          <p:cTn id="10" fill="hold">
+                            <p:stCondLst>
+                              <p:cond delay="0"/>
+                            </p:stCondLst>
+                            <p:childTnLst>
+                              <p:par>
+                                <p:cTn id="11" presetID="1" presetClass="entr" presetSubtype="0" fill="hold" grpId="0" nodeType="clickEffect">
+                                  <p:stCondLst>
+                                    <p:cond delay="0"/>
+                                  </p:stCondLst>
+                                  <p:childTnLst>
+                                    <p:set>
+                                      <p:cBhvr>
+                                        <p:cTn id="12" dur="1" fill="hold">
+                                          <p:stCondLst>
+                                            <p:cond delay="0"/>
+                                          </p:stCondLst>
+                                        </p:cTn>
+                                        <p:tgtEl>
+                                          <p:spTgt spid="7">
+                                            <p:txEl>
+                                              <p:pRg st="2" end="2"/>
+                                            </p:txEl>
+                                          </p:spTgt>
+                                        </p:tgtEl>
+                                        <p:attrNameLst>
+                                          <p:attrName>style.visibility</p:attrName>
+                                        </p:attrNameLst>
+                                      </p:cBhvr>
+                                      <p:to>
+                                        <p:strVal val="visible"/>
+                                      </p:to>
+                                    </p:set>
+                                  </p:childTnLst>
+                                </p:cTn>
+                              </p:par>
+                              <p:par>
+                                <p:cTn id="13" presetID="1" presetClass="entr" presetSubtype="0" fill="hold" grpId="0" nodeType="withEffect">
+                                  <p:stCondLst>
+                                    <p:cond delay="0"/>
+                                  </p:stCondLst>
+                                  <p:childTnLst>
+                                    <p:set>
+                                      <p:cBhvr>
+                                        <p:cTn id="14" dur="1" fill="hold">
+                                          <p:stCondLst>
+                                            <p:cond delay="0"/>
+                                          </p:stCondLst>
+                                        </p:cTn>
+                                        <p:tgtEl>
+                                          <p:spTgt spid="7">
+                                            <p:txEl>
+                                              <p:pRg st="3" end="3"/>
+                                            </p:txEl>
+                                          </p:spTgt>
+                                        </p:tgtEl>
+                                        <p:attrNameLst>
+                                          <p:attrName>style.visibility</p:attrName>
+                                        </p:attrNameLst>
+                                      </p:cBhvr>
+                                      <p:to>
+                                        <p:strVal val="visible"/>
+                                      </p:to>
+                                    </p:set>
+                                  </p:childTnLst>
+                                </p:cTn>
+                              </p:par>
+                            </p:childTnLst>
+                          </p:cTn>
+                        </p:par>
+                      </p:childTnLst>
+                    </p:cTn>
+                  </p:par>
+                  <p:par>
+                    <p:cTn id="15" fill="hold">
+                      <p:stCondLst>
+                        <p:cond delay="indefinite"/>
+                      </p:stCondLst>
+                      <p:childTnLst>
+                        <p:par>
+                          <p:cTn id="16" fill="hold">
+                            <p:stCondLst>
+                              <p:cond delay="0"/>
+                            </p:stCondLst>
+                            <p:childTnLst>
+                              <p:par>
+                                <p:cTn id="17" presetID="1" presetClass="entr" presetSubtype="0" fill="hold" grpId="0" nodeType="clickEffect">
+                                  <p:stCondLst>
+                                    <p:cond delay="0"/>
+                                  </p:stCondLst>
+                                  <p:childTnLst>
+                                    <p:set>
+                                      <p:cBhvr>
+                                        <p:cTn id="18" dur="1" fill="hold">
+                                          <p:stCondLst>
+                                            <p:cond delay="0"/>
+                                          </p:stCondLst>
+                                        </p:cTn>
+                                        <p:tgtEl>
+                                          <p:spTgt spid="7">
+                                            <p:txEl>
+                                              <p:pRg st="4" end="4"/>
+                                            </p:txEl>
+                                          </p:spTgt>
+                                        </p:tgtEl>
+                                        <p:attrNameLst>
+                                          <p:attrName>style.visibility</p:attrName>
+                                        </p:attrNameLst>
+                                      </p:cBhvr>
+                                      <p:to>
+                                        <p:strVal val="visible"/>
+                                      </p:to>
+                                    </p:set>
+                                  </p:childTnLst>
+                                </p:cTn>
+                              </p:par>
+                            </p:childTnLst>
+                          </p:cTn>
+                        </p:par>
+                      </p:childTnLst>
+                    </p:cTn>
+                  </p:par>
+                  <p:par>
+                    <p:cTn id="19" fill="hold">
+                      <p:stCondLst>
+                        <p:cond delay="indefinite"/>
+                      </p:stCondLst>
+                      <p:childTnLst>
+                        <p:par>
+                          <p:cTn id="20" fill="hold">
+                            <p:stCondLst>
+                              <p:cond delay="0"/>
+                            </p:stCondLst>
+                            <p:childTnLst>
+                              <p:par>
+                                <p:cTn id="21" presetID="1" presetClass="entr" presetSubtype="0" fill="hold" grpId="0" nodeType="clickEffect">
+                                  <p:stCondLst>
+                                    <p:cond delay="0"/>
+                                  </p:stCondLst>
+                                  <p:childTnLst>
+                                    <p:set>
+                                      <p:cBhvr>
+                                        <p:cTn id="22" dur="1" fill="hold">
+                                          <p:stCondLst>
+                                            <p:cond delay="0"/>
+                                          </p:stCondLst>
+                                        </p:cTn>
+                                        <p:tgtEl>
+                                          <p:spTgt spid="7">
+                                            <p:txEl>
+                                              <p:pRg st="5" end="5"/>
+                                            </p:txEl>
+                                          </p:spTgt>
+                                        </p:tgtEl>
+                                        <p:attrNameLst>
+                                          <p:attrName>style.visibility</p:attrName>
+                                        </p:attrNameLst>
+                                      </p:cBhvr>
+                                      <p:to>
+                                        <p:strVal val="visible"/>
+                                      </p:to>
+                                    </p:set>
+                                  </p:childTnLst>
+                                </p:cTn>
+                              </p:par>
+                              <p:par>
+                                <p:cTn id="23" presetID="1" presetClass="entr" presetSubtype="0" fill="hold" grpId="0" nodeType="withEffect">
+                                  <p:stCondLst>
+                                    <p:cond delay="0"/>
+                                  </p:stCondLst>
+                                  <p:childTnLst>
+                                    <p:set>
+                                      <p:cBhvr>
+                                        <p:cTn id="24" dur="1" fill="hold">
+                                          <p:stCondLst>
+                                            <p:cond delay="0"/>
+                                          </p:stCondLst>
+                                        </p:cTn>
+                                        <p:tgtEl>
+                                          <p:spTgt spid="7">
+                                            <p:txEl>
+                                              <p:pRg st="6" end="6"/>
+                                            </p:txEl>
+                                          </p:spTgt>
+                                        </p:tgtEl>
+                                        <p:attrNameLst>
+                                          <p:attrName>style.visibility</p:attrName>
+                                        </p:attrNameLst>
+                                      </p:cBhvr>
+                                      <p:to>
+                                        <p:strVal val="visible"/>
+                                      </p:to>
+                                    </p:set>
+                                  </p:childTnLst>
+                                </p:cTn>
+                              </p:par>
+                              <p:par>
+                                <p:cTn id="25" presetID="1" presetClass="entr" presetSubtype="0" fill="hold" grpId="0" nodeType="withEffect">
+                                  <p:stCondLst>
+                                    <p:cond delay="0"/>
+                                  </p:stCondLst>
+                                  <p:childTnLst>
+                                    <p:set>
+                                      <p:cBhvr>
+                                        <p:cTn id="26" dur="1" fill="hold">
+                                          <p:stCondLst>
+                                            <p:cond delay="0"/>
+                                          </p:stCondLst>
+                                        </p:cTn>
+                                        <p:tgtEl>
+                                          <p:spTgt spid="7">
+                                            <p:txEl>
+                                              <p:pRg st="7" end="7"/>
+                                            </p:txEl>
+                                          </p:spTgt>
+                                        </p:tgtEl>
+                                        <p:attrNameLst>
+                                          <p:attrName>style.visibility</p:attrName>
+                                        </p:attrNameLst>
+                                      </p:cBhvr>
+                                      <p:to>
+                                        <p:strVal val="visible"/>
+                                      </p:to>
+                                    </p:set>
+                                  </p:childTnLst>
+                                </p:cTn>
+                              </p:par>
+                              <p:par>
+                                <p:cTn id="27" presetID="1" presetClass="entr" presetSubtype="0" fill="hold" grpId="0" nodeType="withEffect">
+                                  <p:stCondLst>
+                                    <p:cond delay="0"/>
+                                  </p:stCondLst>
+                                  <p:childTnLst>
+                                    <p:set>
+                                      <p:cBhvr>
+                                        <p:cTn id="28" dur="1" fill="hold">
+                                          <p:stCondLst>
+                                            <p:cond delay="0"/>
+                                          </p:stCondLst>
+                                        </p:cTn>
+                                        <p:tgtEl>
+                                          <p:spTgt spid="7">
+                                            <p:txEl>
+                                              <p:pRg st="8" end="8"/>
+                                            </p:txEl>
+                                          </p:spTgt>
+                                        </p:tgtEl>
+                                        <p:attrNameLst>
+                                          <p:attrName>style.visibility</p:attrName>
+                                        </p:attrNameLst>
+                                      </p:cBhvr>
+                                      <p:to>
+                                        <p:strVal val="visible"/>
+                                      </p:to>
+                                    </p:set>
+                                  </p:childTnLst>
+                                </p:cTn>
+                              </p:par>
+                            </p:childTnLst>
+                          </p:cTn>
+                        </p:par>
+                      </p:childTnLst>
+                    </p:cTn>
+                  </p:par>
+                </p:childTnLst>
+              </p:cTn>
+              <p:prevCondLst>
+                <p:cond evt="onPrev" delay="0">
+                  <p:tgtEl>
+                    <p:sldTgt/>
+                  </p:tgtEl>
+                </p:cond>
+              </p:prevCondLst>
+              <p:nextCondLst>
+                <p:cond evt="onNext" delay="0">
+                  <p:tgtEl>
+                    <p:sldTgt/>
+                  </p:tgtEl>
+                </p:cond>
+              </p:nextCondLst>
+            </p:seq>
+          </p:childTnLst>
+        </p:cTn>
+      </p:par>
+    </p:tnLst>
+    <p:bldLst>
+      <p:bldP spid="7" grpId="0" uiExpand="1" build="p"/>
+    </p:bldLst>
+  </p:timing>
 </p:sld>
 </file>
 
